--- a/32-Bit Vedic Multiplier Project Presentation.pptx
+++ b/32-Bit Vedic Multiplier Project Presentation.pptx
@@ -308,32 +308,24 @@
   <pc:docChgLst>
     <pc:chgData name="Abdul Hameed" userId="927015356d13ec96" providerId="LiveId" clId="{7297035E-FB08-4EEE-95F1-B50AAE8DC85F}"/>
     <pc:docChg chg="undo redo custSel modSld">
-      <pc:chgData name="Abdul Hameed" userId="927015356d13ec96" providerId="LiveId" clId="{7297035E-FB08-4EEE-95F1-B50AAE8DC85F}" dt="2026-01-27T04:03:08.372" v="63" actId="1036"/>
+      <pc:chgData name="Abdul Hameed" userId="927015356d13ec96" providerId="LiveId" clId="{7297035E-FB08-4EEE-95F1-B50AAE8DC85F}" dt="2026-03-07T06:57:15.375" v="162" actId="255"/>
       <pc:docMkLst>
         <pc:docMk/>
       </pc:docMkLst>
       <pc:sldChg chg="modSp mod">
-        <pc:chgData name="Abdul Hameed" userId="927015356d13ec96" providerId="LiveId" clId="{7297035E-FB08-4EEE-95F1-B50AAE8DC85F}" dt="2026-01-27T04:03:08.372" v="63" actId="1036"/>
+        <pc:chgData name="Abdul Hameed" userId="927015356d13ec96" providerId="LiveId" clId="{7297035E-FB08-4EEE-95F1-B50AAE8DC85F}" dt="2026-03-07T06:57:15.375" v="162" actId="255"/>
         <pc:sldMkLst>
           <pc:docMk/>
           <pc:sldMk cId="0" sldId="256"/>
         </pc:sldMkLst>
         <pc:spChg chg="mod">
-          <ac:chgData name="Abdul Hameed" userId="927015356d13ec96" providerId="LiveId" clId="{7297035E-FB08-4EEE-95F1-B50AAE8DC85F}" dt="2026-01-22T02:49:23.146" v="8" actId="20577"/>
+          <ac:chgData name="Abdul Hameed" userId="927015356d13ec96" providerId="LiveId" clId="{7297035E-FB08-4EEE-95F1-B50AAE8DC85F}" dt="2026-03-07T06:57:15.375" v="162" actId="255"/>
           <ac:spMkLst>
             <pc:docMk/>
             <pc:sldMk cId="0" sldId="256"/>
-            <ac:spMk id="85" creationId="{00000000-0000-0000-0000-000000000000}"/>
+            <ac:spMk id="88" creationId="{00000000-0000-0000-0000-000000000000}"/>
           </ac:spMkLst>
         </pc:spChg>
-        <pc:picChg chg="mod">
-          <ac:chgData name="Abdul Hameed" userId="927015356d13ec96" providerId="LiveId" clId="{7297035E-FB08-4EEE-95F1-B50AAE8DC85F}" dt="2026-01-27T04:03:08.372" v="63" actId="1036"/>
-          <ac:picMkLst>
-            <pc:docMk/>
-            <pc:sldMk cId="0" sldId="256"/>
-            <ac:picMk id="84" creationId="{00000000-0000-0000-0000-000000000000}"/>
-          </ac:picMkLst>
-        </pc:picChg>
       </pc:sldChg>
       <pc:sldChg chg="modSp mod modNotes">
         <pc:chgData name="Abdul Hameed" userId="927015356d13ec96" providerId="LiveId" clId="{7297035E-FB08-4EEE-95F1-B50AAE8DC85F}" dt="2026-01-22T03:03:29.536" v="11" actId="14100"/>
@@ -341,14 +333,6 @@
           <pc:docMk/>
           <pc:sldMk cId="0" sldId="258"/>
         </pc:sldMkLst>
-        <pc:picChg chg="mod">
-          <ac:chgData name="Abdul Hameed" userId="927015356d13ec96" providerId="LiveId" clId="{7297035E-FB08-4EEE-95F1-B50AAE8DC85F}" dt="2026-01-22T03:03:29.536" v="11" actId="14100"/>
-          <ac:picMkLst>
-            <pc:docMk/>
-            <pc:sldMk cId="0" sldId="258"/>
-            <ac:picMk id="112" creationId="{00000000-0000-0000-0000-000000000000}"/>
-          </ac:picMkLst>
-        </pc:picChg>
       </pc:sldChg>
       <pc:sldChg chg="modSp mod modNotes">
         <pc:chgData name="Abdul Hameed" userId="927015356d13ec96" providerId="LiveId" clId="{7297035E-FB08-4EEE-95F1-B50AAE8DC85F}" dt="2026-01-22T03:05:41.450" v="30" actId="14100"/>
@@ -356,29 +340,21 @@
           <pc:docMk/>
           <pc:sldMk cId="0" sldId="259"/>
         </pc:sldMkLst>
-        <pc:picChg chg="mod">
-          <ac:chgData name="Abdul Hameed" userId="927015356d13ec96" providerId="LiveId" clId="{7297035E-FB08-4EEE-95F1-B50AAE8DC85F}" dt="2026-01-22T03:05:41.450" v="30" actId="14100"/>
-          <ac:picMkLst>
-            <pc:docMk/>
-            <pc:sldMk cId="0" sldId="259"/>
-            <ac:picMk id="128" creationId="{00000000-0000-0000-0000-000000000000}"/>
-          </ac:picMkLst>
-        </pc:picChg>
       </pc:sldChg>
-      <pc:sldChg chg="modSp mod modNotes">
-        <pc:chgData name="Abdul Hameed" userId="927015356d13ec96" providerId="LiveId" clId="{7297035E-FB08-4EEE-95F1-B50AAE8DC85F}" dt="2026-01-22T03:37:50.270" v="32" actId="1076"/>
+      <pc:sldChg chg="addSp modSp mod modNotes">
+        <pc:chgData name="Abdul Hameed" userId="927015356d13ec96" providerId="LiveId" clId="{7297035E-FB08-4EEE-95F1-B50AAE8DC85F}" dt="2026-03-07T06:50:19.750" v="114" actId="767"/>
         <pc:sldMkLst>
           <pc:docMk/>
           <pc:sldMk cId="0" sldId="261"/>
         </pc:sldMkLst>
-        <pc:picChg chg="mod">
-          <ac:chgData name="Abdul Hameed" userId="927015356d13ec96" providerId="LiveId" clId="{7297035E-FB08-4EEE-95F1-B50AAE8DC85F}" dt="2026-01-22T03:37:50.270" v="32" actId="1076"/>
-          <ac:picMkLst>
+        <pc:spChg chg="add mod">
+          <ac:chgData name="Abdul Hameed" userId="927015356d13ec96" providerId="LiveId" clId="{7297035E-FB08-4EEE-95F1-B50AAE8DC85F}" dt="2026-03-07T06:50:19.750" v="114" actId="767"/>
+          <ac:spMkLst>
             <pc:docMk/>
             <pc:sldMk cId="0" sldId="261"/>
-            <ac:picMk id="170" creationId="{00000000-0000-0000-0000-000000000000}"/>
-          </ac:picMkLst>
-        </pc:picChg>
+            <ac:spMk id="2" creationId="{8715C384-8EE6-8B78-C072-2BFC4D511BE1}"/>
+          </ac:spMkLst>
+        </pc:spChg>
       </pc:sldChg>
       <pc:sldChg chg="modSp mod modNotes">
         <pc:chgData name="Abdul Hameed" userId="927015356d13ec96" providerId="LiveId" clId="{7297035E-FB08-4EEE-95F1-B50AAE8DC85F}" dt="2026-01-22T03:38:25.972" v="34" actId="1076"/>
@@ -386,14 +362,6 @@
           <pc:docMk/>
           <pc:sldMk cId="0" sldId="263"/>
         </pc:sldMkLst>
-        <pc:picChg chg="mod">
-          <ac:chgData name="Abdul Hameed" userId="927015356d13ec96" providerId="LiveId" clId="{7297035E-FB08-4EEE-95F1-B50AAE8DC85F}" dt="2026-01-22T03:38:25.972" v="34" actId="1076"/>
-          <ac:picMkLst>
-            <pc:docMk/>
-            <pc:sldMk cId="0" sldId="263"/>
-            <ac:picMk id="202" creationId="{00000000-0000-0000-0000-000000000000}"/>
-          </ac:picMkLst>
-        </pc:picChg>
       </pc:sldChg>
       <pc:sldChg chg="modSp mod modNotes">
         <pc:chgData name="Abdul Hameed" userId="927015356d13ec96" providerId="LiveId" clId="{7297035E-FB08-4EEE-95F1-B50AAE8DC85F}" dt="2026-01-22T03:39:47.988" v="37" actId="1076"/>
@@ -401,23 +369,15 @@
           <pc:docMk/>
           <pc:sldMk cId="0" sldId="267"/>
         </pc:sldMkLst>
-        <pc:picChg chg="mod">
-          <ac:chgData name="Abdul Hameed" userId="927015356d13ec96" providerId="LiveId" clId="{7297035E-FB08-4EEE-95F1-B50AAE8DC85F}" dt="2026-01-22T03:39:47.988" v="37" actId="1076"/>
-          <ac:picMkLst>
-            <pc:docMk/>
-            <pc:sldMk cId="0" sldId="267"/>
-            <ac:picMk id="269" creationId="{00000000-0000-0000-0000-000000000000}"/>
-          </ac:picMkLst>
-        </pc:picChg>
       </pc:sldChg>
       <pc:sldChg chg="modSp mod modNotes">
-        <pc:chgData name="Abdul Hameed" userId="927015356d13ec96" providerId="LiveId" clId="{7297035E-FB08-4EEE-95F1-B50AAE8DC85F}" dt="2026-01-22T03:40:26.389" v="39" actId="1076"/>
+        <pc:chgData name="Abdul Hameed" userId="927015356d13ec96" providerId="LiveId" clId="{7297035E-FB08-4EEE-95F1-B50AAE8DC85F}" dt="2026-03-07T06:56:55.109" v="154" actId="1076"/>
         <pc:sldMkLst>
           <pc:docMk/>
           <pc:sldMk cId="0" sldId="268"/>
         </pc:sldMkLst>
         <pc:picChg chg="mod">
-          <ac:chgData name="Abdul Hameed" userId="927015356d13ec96" providerId="LiveId" clId="{7297035E-FB08-4EEE-95F1-B50AAE8DC85F}" dt="2026-01-22T03:40:26.389" v="39" actId="1076"/>
+          <ac:chgData name="Abdul Hameed" userId="927015356d13ec96" providerId="LiveId" clId="{7297035E-FB08-4EEE-95F1-B50AAE8DC85F}" dt="2026-03-07T06:56:55.109" v="154" actId="1076"/>
           <ac:picMkLst>
             <pc:docMk/>
             <pc:sldMk cId="0" sldId="268"/>
@@ -431,27 +391,19 @@
           <pc:docMk/>
           <pc:sldMk cId="0" sldId="269"/>
         </pc:sldMkLst>
-        <pc:spChg chg="mod">
-          <ac:chgData name="Abdul Hameed" userId="927015356d13ec96" providerId="LiveId" clId="{7297035E-FB08-4EEE-95F1-B50AAE8DC85F}" dt="2026-01-22T03:48:18.862" v="53" actId="255"/>
-          <ac:spMkLst>
-            <pc:docMk/>
-            <pc:sldMk cId="0" sldId="269"/>
-            <ac:spMk id="286" creationId="{00000000-0000-0000-0000-000000000000}"/>
-          </ac:spMkLst>
-        </pc:spChg>
       </pc:sldChg>
-      <pc:sldChg chg="delSp modSp mod">
-        <pc:chgData name="Abdul Hameed" userId="927015356d13ec96" providerId="LiveId" clId="{7297035E-FB08-4EEE-95F1-B50AAE8DC85F}" dt="2026-01-22T03:50:13.508" v="60" actId="1076"/>
+      <pc:sldChg chg="addSp delSp modSp mod">
+        <pc:chgData name="Abdul Hameed" userId="927015356d13ec96" providerId="LiveId" clId="{7297035E-FB08-4EEE-95F1-B50AAE8DC85F}" dt="2026-03-07T06:57:03.081" v="159" actId="767"/>
         <pc:sldMkLst>
           <pc:docMk/>
           <pc:sldMk cId="0" sldId="276"/>
         </pc:sldMkLst>
-        <pc:spChg chg="mod">
-          <ac:chgData name="Abdul Hameed" userId="927015356d13ec96" providerId="LiveId" clId="{7297035E-FB08-4EEE-95F1-B50AAE8DC85F}" dt="2026-01-22T03:50:13.508" v="60" actId="1076"/>
+        <pc:spChg chg="add mod">
+          <ac:chgData name="Abdul Hameed" userId="927015356d13ec96" providerId="LiveId" clId="{7297035E-FB08-4EEE-95F1-B50AAE8DC85F}" dt="2026-03-07T06:57:03.081" v="159" actId="767"/>
           <ac:spMkLst>
             <pc:docMk/>
             <pc:sldMk cId="0" sldId="276"/>
-            <ac:spMk id="396" creationId="{00000000-0000-0000-0000-000000000000}"/>
+            <ac:spMk id="2" creationId="{68F753D8-373F-9115-9F26-B4AAED6CA98F}"/>
           </ac:spMkLst>
         </pc:spChg>
       </pc:sldChg>
@@ -13217,7 +13169,7 @@
         <p:spPr>
           <a:xfrm>
             <a:off x="190500" y="-5357"/>
-            <a:ext cx="11811000" cy="2178843"/>
+            <a:ext cx="11811000" cy="2725361"/>
           </a:xfrm>
           <a:prstGeom prst="rect">
             <a:avLst/>
@@ -13246,7 +13198,7 @@
               <a:buNone/>
             </a:pPr>
             <a:r>
-              <a:rPr lang="en-US" sz="3900" b="1" i="0" u="none" strike="noStrike" cap="none">
+              <a:rPr lang="en-US" sz="3900" b="1" i="0" u="none" strike="noStrike" cap="none" dirty="0">
                 <a:solidFill>
                   <a:srgbClr val="F3F0DF"/>
                 </a:solidFill>
@@ -13255,10 +13207,34 @@
                 <a:cs typeface="Merriweather"/>
                 <a:sym typeface="Merriweather"/>
               </a:rPr>
-              <a:t>CREATE A 32-BIT VEDIC MULTIPLIER</a:t>
+              <a:t>CREATE A </a:t>
+            </a:r>
+            <a:r>
+              <a:rPr lang="en-US" sz="4400" b="1" i="0" u="none" strike="noStrike" cap="none" dirty="0">
+                <a:solidFill>
+                  <a:srgbClr val="F3F0DF"/>
+                </a:solidFill>
+                <a:latin typeface="Merriweather"/>
+                <a:ea typeface="Merriweather"/>
+                <a:cs typeface="Merriweather"/>
+                <a:sym typeface="Merriweather"/>
+              </a:rPr>
+              <a:t>32</a:t>
+            </a:r>
+            <a:r>
+              <a:rPr lang="en-US" sz="3900" b="1" i="0" u="none" strike="noStrike" cap="none" dirty="0">
+                <a:solidFill>
+                  <a:srgbClr val="F3F0DF"/>
+                </a:solidFill>
+                <a:latin typeface="Merriweather"/>
+                <a:ea typeface="Merriweather"/>
+                <a:cs typeface="Merriweather"/>
+                <a:sym typeface="Merriweather"/>
+              </a:rPr>
+              <a:t>-BIT VEDIC MULTIPLIER</a:t>
             </a:r>
             <a:br>
-              <a:rPr lang="en-US" sz="1800" b="0" i="0" u="none" strike="noStrike" cap="none">
+              <a:rPr lang="en-US" sz="1800" b="0" i="0" u="none" strike="noStrike" cap="none" dirty="0">
                 <a:solidFill>
                   <a:schemeClr val="dk1"/>
                 </a:solidFill>
@@ -13269,7 +13245,7 @@
               </a:rPr>
             </a:br>
             <a:r>
-              <a:rPr lang="en-US" sz="3900" b="1" i="0" u="none" strike="noStrike" cap="none">
+              <a:rPr lang="en-US" sz="3900" b="1" i="0" u="none" strike="noStrike" cap="none" dirty="0">
                 <a:solidFill>
                   <a:srgbClr val="F3F0DF"/>
                 </a:solidFill>
@@ -13281,7 +13257,7 @@
               <a:t> AND COMPARE IT AGAINST OTHER</a:t>
             </a:r>
             <a:br>
-              <a:rPr lang="en-US" sz="1800" b="0" i="0" u="none" strike="noStrike" cap="none">
+              <a:rPr lang="en-US" sz="1800" b="0" i="0" u="none" strike="noStrike" cap="none" dirty="0">
                 <a:solidFill>
                   <a:schemeClr val="dk1"/>
                 </a:solidFill>
@@ -13292,7 +13268,7 @@
               </a:rPr>
             </a:br>
             <a:r>
-              <a:rPr lang="en-US" sz="3900" b="1" i="0" u="none" strike="noStrike" cap="none">
+              <a:rPr lang="en-US" sz="3900" b="1" i="0" u="none" strike="noStrike" cap="none" dirty="0">
                 <a:solidFill>
                   <a:srgbClr val="F3F0DF"/>
                 </a:solidFill>
@@ -13303,7 +13279,7 @@
               </a:rPr>
               <a:t> MULTIPLIER USING A PARALLEL PREFIX ADDER</a:t>
             </a:r>
-            <a:endParaRPr/>
+            <a:endParaRPr dirty="0"/>
           </a:p>
         </p:txBody>
       </p:sp>
@@ -15462,8 +15438,8 @@
         </p:blipFill>
         <p:spPr>
           <a:xfrm>
-            <a:off x="5934075" y="2009775"/>
-            <a:ext cx="6096000" cy="4035747"/>
+            <a:off x="5810250" y="2124075"/>
+            <a:ext cx="6096000" cy="3705224"/>
           </a:xfrm>
           <a:prstGeom prst="rect">
             <a:avLst/>
@@ -19863,7 +19839,7 @@
               <a:buNone/>
             </a:pPr>
             <a:r>
-              <a:rPr lang="en-US" sz="1050" b="0" i="0" u="none" strike="noStrike" cap="none">
+              <a:rPr lang="en-US" sz="1050" b="0" i="0" u="none" strike="noStrike" cap="none" dirty="0">
                 <a:solidFill>
                   <a:srgbClr val="94A3B8"/>
                 </a:solidFill>
@@ -19874,7 +19850,7 @@
               </a:rPr>
               <a:t>Batch 10 - ECE</a:t>
             </a:r>
-            <a:endParaRPr/>
+            <a:endParaRPr dirty="0"/>
           </a:p>
         </p:txBody>
       </p:sp>
@@ -19961,6 +19937,38 @@
               <a:t>THANK YOU</a:t>
             </a:r>
             <a:endParaRPr dirty="0"/>
+          </a:p>
+        </p:txBody>
+      </p:sp>
+      <p:sp>
+        <p:nvSpPr>
+          <p:cNvPr id="2" name="TextBox 1">
+            <a:extLst>
+              <a:ext uri="{FF2B5EF4-FFF2-40B4-BE49-F238E27FC236}">
+                <a16:creationId xmlns:a16="http://schemas.microsoft.com/office/drawing/2014/main" id="{68F753D8-373F-9115-9F26-B4AAED6CA98F}"/>
+              </a:ext>
+            </a:extLst>
+          </p:cNvPr>
+          <p:cNvSpPr txBox="1"/>
+          <p:nvPr/>
+        </p:nvSpPr>
+        <p:spPr>
+          <a:xfrm>
+            <a:off x="10662699" y="6575729"/>
+            <a:ext cx="184731" cy="307777"/>
+          </a:xfrm>
+          <a:prstGeom prst="rect">
+            <a:avLst/>
+          </a:prstGeom>
+          <a:noFill/>
+        </p:spPr>
+        <p:txBody>
+          <a:bodyPr wrap="square" rtlCol="0">
+            <a:spAutoFit/>
+          </a:bodyPr>
+          <a:lstStyle/>
+          <a:p>
+            <a:endParaRPr lang="en-IN" dirty="0"/>
           </a:p>
         </p:txBody>
       </p:sp>
